--- a/documentation/Documentation/Definition of need and organisations/Roadmap/ESP_SFM_Roadmap.pptx
+++ b/documentation/Documentation/Definition of need and organisations/Roadmap/ESP_SFM_Roadmap.pptx
@@ -10046,7 +10046,7 @@
                 <a:buNone/>
               </a:pPr>
               <a:r>
-                <a:rPr lang="en" sz="1700" dirty="0">
+                <a:rPr lang="fr-FR" sz="1700" dirty="0">
                   <a:solidFill>
                     <a:srgbClr val="434343"/>
                   </a:solidFill>
@@ -10055,7 +10055,7 @@
                   <a:cs typeface="Fira Sans Extra Condensed Medium"/>
                   <a:sym typeface="Fira Sans Extra Condensed Medium"/>
                 </a:rPr>
-                <a:t>Delivery 1</a:t>
+                <a:t>06/11/2024</a:t>
               </a:r>
               <a:endParaRPr sz="1700" dirty="0">
                 <a:solidFill>
@@ -10652,7 +10652,7 @@
                   <a:cs typeface="Fira Sans Extra Condensed Medium"/>
                   <a:sym typeface="Fira Sans Extra Condensed Medium"/>
                 </a:rPr>
-                <a:t>Delivery 5</a:t>
+                <a:t>03/18/2025</a:t>
               </a:r>
             </a:p>
           </p:txBody>
@@ -11175,7 +11175,7 @@
                   <a:cs typeface="Fira Sans Extra Condensed Medium"/>
                   <a:sym typeface="Fira Sans Extra Condensed Medium"/>
                 </a:rPr>
-                <a:t>Delivery 4</a:t>
+                <a:t>02/11/2025</a:t>
               </a:r>
             </a:p>
           </p:txBody>
@@ -11623,9 +11623,9 @@
         <p:grpSpPr>
           <a:xfrm>
             <a:off x="2794027" y="694260"/>
-            <a:ext cx="1884600" cy="1598471"/>
+            <a:ext cx="1884600" cy="1598472"/>
             <a:chOff x="2786950" y="593575"/>
-            <a:chExt cx="1884600" cy="1598471"/>
+            <a:chExt cx="1884600" cy="1598472"/>
           </a:xfrm>
         </p:grpSpPr>
         <p:sp>
@@ -11768,7 +11768,7 @@
                   <a:cs typeface="Fira Sans Extra Condensed Medium"/>
                   <a:sym typeface="Fira Sans Extra Condensed Medium"/>
                 </a:rPr>
-                <a:t>Delivery 2</a:t>
+                <a:t>10/29/2024</a:t>
               </a:r>
             </a:p>
           </p:txBody>
@@ -13457,7 +13457,7 @@
                   <a:cs typeface="Fira Sans Extra Condensed Medium"/>
                   <a:sym typeface="Fira Sans Extra Condensed Medium"/>
                 </a:rPr>
-                <a:t>Delivery 3</a:t>
+                <a:t>12/31/2024</a:t>
               </a:r>
             </a:p>
           </p:txBody>
@@ -14371,7 +14371,7 @@
                   <a:cs typeface="Fira Sans Extra Condensed Medium"/>
                   <a:sym typeface="Fira Sans Extra Condensed Medium"/>
                 </a:rPr>
-                <a:t>Delivery 6</a:t>
+                <a:t>05/20/2025</a:t>
               </a:r>
             </a:p>
           </p:txBody>
